--- a/builder/assets/reference-pages/small-multiples.pptx
+++ b/builder/assets/reference-pages/small-multiples.pptx
@@ -1097,7 +1097,7 @@
                   <a:srgbClr val="15375F"/>
                 </a:solidFill>
               </a:rPr>
-              <a:t>九条业务线中只有三条持续跑赢公司均值</a:t>
+              <a:t>Only three of the nine business lines consistently outperformed the company average.</a:t>
             </a:r>
           </a:p>
         </p:txBody>
@@ -1182,7 +1182,7 @@
                   <a:srgbClr val="15375F"/>
                 </a:solidFill>
               </a:rPr>
-              <a:t>业务 A</a:t>
+              <a:t>business A</a:t>
             </a:r>
           </a:p>
         </p:txBody>
@@ -1232,7 +1232,7 @@
                   <a:srgbClr val="2F6FB2"/>
                 </a:solidFill>
               </a:rPr>
-              <a:t>期末 90｜CAGR +高</a:t>
+              <a:t>End of term 90｜CAGR +high</a:t>
             </a:r>
           </a:p>
         </p:txBody>
@@ -1530,7 +1530,7 @@
                   <a:srgbClr val="2F6FB2"/>
                 </a:solidFill>
               </a:rPr>
-              <a:t>加大投入</a:t>
+              <a:t>Increase investment</a:t>
             </a:r>
           </a:p>
         </p:txBody>
@@ -1615,7 +1615,7 @@
                   <a:srgbClr val="15375F"/>
                 </a:solidFill>
               </a:rPr>
-              <a:t>业务 B</a:t>
+              <a:t>business B</a:t>
             </a:r>
           </a:p>
         </p:txBody>
@@ -1665,7 +1665,7 @@
                   <a:srgbClr val="2F6FB2"/>
                 </a:solidFill>
               </a:rPr>
-              <a:t>期末 84｜CAGR +高</a:t>
+              <a:t>End of term 84｜CAGR +high</a:t>
             </a:r>
           </a:p>
         </p:txBody>
@@ -1963,7 +1963,7 @@
                   <a:srgbClr val="2F6FB2"/>
                 </a:solidFill>
               </a:rPr>
-              <a:t>加大投入</a:t>
+              <a:t>Increase investment</a:t>
             </a:r>
           </a:p>
         </p:txBody>
@@ -2048,7 +2048,7 @@
                   <a:srgbClr val="15375F"/>
                 </a:solidFill>
               </a:rPr>
-              <a:t>业务 C</a:t>
+              <a:t>business C</a:t>
             </a:r>
           </a:p>
         </p:txBody>
@@ -2098,7 +2098,7 @@
                   <a:srgbClr val="697386"/>
                 </a:solidFill>
               </a:rPr>
-              <a:t>期末 82｜CAGR +低</a:t>
+              <a:t>End of term 82｜CAGR +low</a:t>
             </a:r>
           </a:p>
         </p:txBody>
@@ -2396,7 +2396,7 @@
                   <a:srgbClr val="697386"/>
                 </a:solidFill>
               </a:rPr>
-              <a:t>维持</a:t>
+              <a:t>maintain</a:t>
             </a:r>
           </a:p>
         </p:txBody>
@@ -2481,7 +2481,7 @@
                   <a:srgbClr val="15375F"/>
                 </a:solidFill>
               </a:rPr>
-              <a:t>业务 D</a:t>
+              <a:t>business D</a:t>
             </a:r>
           </a:p>
         </p:txBody>
@@ -2531,7 +2531,7 @@
                   <a:srgbClr val="E8872D"/>
                 </a:solidFill>
               </a:rPr>
-              <a:t>期末 70｜CAGR +低</a:t>
+              <a:t>End of term 70｜CAGR +low</a:t>
             </a:r>
           </a:p>
         </p:txBody>
@@ -2829,7 +2829,7 @@
                   <a:srgbClr val="E8872D"/>
                 </a:solidFill>
               </a:rPr>
-              <a:t>退出或收缩</a:t>
+              <a:t>Exit or shrink</a:t>
             </a:r>
           </a:p>
         </p:txBody>
@@ -2914,7 +2914,7 @@
                   <a:srgbClr val="15375F"/>
                 </a:solidFill>
               </a:rPr>
-              <a:t>业务 E</a:t>
+              <a:t>business E</a:t>
             </a:r>
           </a:p>
         </p:txBody>
@@ -2964,7 +2964,7 @@
                   <a:srgbClr val="697386"/>
                 </a:solidFill>
               </a:rPr>
-              <a:t>期末 73｜CAGR +高</a:t>
+              <a:t>End of term 73｜CAGR +high</a:t>
             </a:r>
           </a:p>
         </p:txBody>
@@ -3262,7 +3262,7 @@
                   <a:srgbClr val="697386"/>
                 </a:solidFill>
               </a:rPr>
-              <a:t>维持</a:t>
+              <a:t>maintain</a:t>
             </a:r>
           </a:p>
         </p:txBody>
@@ -3347,7 +3347,7 @@
                   <a:srgbClr val="15375F"/>
                 </a:solidFill>
               </a:rPr>
-              <a:t>业务 F</a:t>
+              <a:t>business F</a:t>
             </a:r>
           </a:p>
         </p:txBody>
@@ -3397,7 +3397,7 @@
                   <a:srgbClr val="E8872D"/>
                 </a:solidFill>
               </a:rPr>
-              <a:t>期末 76｜CAGR +低</a:t>
+              <a:t>End of term 76｜CAGR +low</a:t>
             </a:r>
           </a:p>
         </p:txBody>
@@ -3695,7 +3695,7 @@
                   <a:srgbClr val="E8872D"/>
                 </a:solidFill>
               </a:rPr>
-              <a:t>退出或收缩</a:t>
+              <a:t>Exit or shrink</a:t>
             </a:r>
           </a:p>
         </p:txBody>
@@ -3780,7 +3780,7 @@
                   <a:srgbClr val="15375F"/>
                 </a:solidFill>
               </a:rPr>
-              <a:t>业务 G</a:t>
+              <a:t>business G</a:t>
             </a:r>
           </a:p>
         </p:txBody>
@@ -3830,7 +3830,7 @@
                   <a:srgbClr val="2F6FB2"/>
                 </a:solidFill>
               </a:rPr>
-              <a:t>期末 86｜CAGR +高</a:t>
+              <a:t>End of term 86｜CAGR +high</a:t>
             </a:r>
           </a:p>
         </p:txBody>
@@ -4128,7 +4128,7 @@
                   <a:srgbClr val="2F6FB2"/>
                 </a:solidFill>
               </a:rPr>
-              <a:t>加大投入</a:t>
+              <a:t>Increase investment</a:t>
             </a:r>
           </a:p>
         </p:txBody>
@@ -4213,7 +4213,7 @@
                   <a:srgbClr val="15375F"/>
                 </a:solidFill>
               </a:rPr>
-              <a:t>业务 H</a:t>
+              <a:t>business H</a:t>
             </a:r>
           </a:p>
         </p:txBody>
@@ -4263,7 +4263,7 @@
                   <a:srgbClr val="697386"/>
                 </a:solidFill>
               </a:rPr>
-              <a:t>期末 77｜CAGR +低</a:t>
+              <a:t>End of term 77｜CAGR +low</a:t>
             </a:r>
           </a:p>
         </p:txBody>
@@ -4561,7 +4561,7 @@
                   <a:srgbClr val="697386"/>
                 </a:solidFill>
               </a:rPr>
-              <a:t>维持</a:t>
+              <a:t>maintain</a:t>
             </a:r>
           </a:p>
         </p:txBody>
@@ -4646,7 +4646,7 @@
                   <a:srgbClr val="15375F"/>
                 </a:solidFill>
               </a:rPr>
-              <a:t>业务 I</a:t>
+              <a:t>business I</a:t>
             </a:r>
           </a:p>
         </p:txBody>
@@ -4696,7 +4696,7 @@
                   <a:srgbClr val="E8872D"/>
                 </a:solidFill>
               </a:rPr>
-              <a:t>期末 64｜CAGR +低</a:t>
+              <a:t>End of term 64｜CAGR +low</a:t>
             </a:r>
           </a:p>
         </p:txBody>
@@ -4994,14 +4994,14 @@
                   <a:srgbClr val="E8872D"/>
                 </a:solidFill>
               </a:rPr>
-              <a:t>退出或收缩</a:t>
+              <a:t>Exit or shrink</a:t>
             </a:r>
           </a:p>
         </p:txBody>
       </p:sp>
       <p:sp>
         <p:nvSpPr>
-          <p:cNvPr id="110" name="关键洞察-rail">
+          <p:cNvPr id="110" name="key insights-rail">
             <a:extLst xmlns:a="http://schemas.openxmlformats.org/drawingml/2006/main">
               <a:ext uri="{FF2B5EF4-FFF2-40B4-BE49-F238E27FC236}">
                 <a16:creationId xmlns:a16="http://schemas.microsoft.com/office/drawing/2014/main" id="{E8C77533-C4CB-4B5B-8092-F758ACB98D02}"/>
@@ -5036,7 +5036,7 @@
       </p:sp>
       <p:sp>
         <p:nvSpPr>
-          <p:cNvPr id="111" name="关键洞察-title">
+          <p:cNvPr id="111" name="key insights-title">
             <a:extLst xmlns:a="http://schemas.openxmlformats.org/drawingml/2006/main">
               <a:ext uri="{FF2B5EF4-FFF2-40B4-BE49-F238E27FC236}">
                 <a16:creationId xmlns:a16="http://schemas.microsoft.com/office/drawing/2014/main" id="{83C23248-AAB1-4C84-8F07-29619DEE662C}"/>
@@ -5079,14 +5079,14 @@
                   <a:srgbClr val="15375F"/>
                 </a:solidFill>
               </a:rPr>
-              <a:t>关键洞察</a:t>
+              <a:t>key insights</a:t>
             </a:r>
           </a:p>
         </p:txBody>
       </p:sp>
       <p:sp>
         <p:nvSpPr>
-          <p:cNvPr id="112" name="关键洞察-item-1">
+          <p:cNvPr id="112" name="key insights-item-1">
             <a:extLst xmlns:a="http://schemas.openxmlformats.org/drawingml/2006/main">
               <a:ext uri="{FF2B5EF4-FFF2-40B4-BE49-F238E27FC236}">
                 <a16:creationId xmlns:a16="http://schemas.microsoft.com/office/drawing/2014/main" id="{6273D565-CAF1-4572-8144-1162DA908BE3}"/>
@@ -5135,14 +5135,14 @@
                   <a:srgbClr val="172033"/>
                 </a:solidFill>
               </a:rPr>
-              <a:t>三条业务线持续跑赢公司均值</a:t>
+              <a:t>Three business lines continue to outperform the company’s average</a:t>
             </a:r>
           </a:p>
         </p:txBody>
       </p:sp>
       <p:sp>
         <p:nvSpPr>
-          <p:cNvPr id="113" name="关键洞察-item-2">
+          <p:cNvPr id="113" name="key insights-item-2">
             <a:extLst xmlns:a="http://schemas.openxmlformats.org/drawingml/2006/main">
               <a:ext uri="{FF2B5EF4-FFF2-40B4-BE49-F238E27FC236}">
                 <a16:creationId xmlns:a16="http://schemas.microsoft.com/office/drawing/2014/main" id="{8F6B7B3D-F3DA-4D6D-B7DD-80B3427796E8}"/>
@@ -5191,14 +5191,14 @@
                   <a:srgbClr val="172033"/>
                 </a:solidFill>
               </a:rPr>
-              <a:t>三条业务线期末低于基准</a:t>
+              <a:t>Three business lines ended the period lower than the benchmark</a:t>
             </a:r>
           </a:p>
         </p:txBody>
       </p:sp>
       <p:sp>
         <p:nvSpPr>
-          <p:cNvPr id="114" name="关键洞察-item-3">
+          <p:cNvPr id="114" name="key insights-item-3">
             <a:extLst xmlns:a="http://schemas.openxmlformats.org/drawingml/2006/main">
               <a:ext uri="{FF2B5EF4-FFF2-40B4-BE49-F238E27FC236}">
                 <a16:creationId xmlns:a16="http://schemas.microsoft.com/office/drawing/2014/main" id="{447F9187-3D67-4D69-A2E5-0F0ECB901BC5}"/>
@@ -5247,7 +5247,7 @@
                   <a:srgbClr val="172033"/>
                 </a:solidFill>
               </a:rPr>
-              <a:t>高增长业务共同具备标准化能力</a:t>
+              <a:t>High-growth businesses share standardization capabilities</a:t>
             </a:r>
           </a:p>
         </p:txBody>
@@ -5303,7 +5303,7 @@
                   <a:srgbClr val="15375F"/>
                 </a:solidFill>
               </a:rPr>
-              <a:t>分类处置：加大投入 3 项，维持 3 项，退出或收缩 3 项</a:t>
+              <a:t>Classified disposal: increase investment 3 item, maintain 3 item, exit or shrink 3 item</a:t>
             </a:r>
           </a:p>
         </p:txBody>
